--- a/presentacion/Cursor_Presentacion.pptx
+++ b/presentacion/Cursor_Presentacion.pptx
@@ -34763,7 +34763,7 @@
                 </a:solidFill>
                 <a:latin typeface="Segoe UI"/>
               </a:rPr>
-              <a:t>Dry-run por defecto; --delete opt-in (no borrar al compañero)</a:t>
+              <a:t>Dry-run por defecto; guardia en AMBAS direcciones (sin --delete también se pisa)</a:t>
             </a:r>
           </a:p>
           <a:p>
